--- a/PPTs/Ch1_See_Program_Running.pptx
+++ b/PPTs/Ch1_See_Program_Running.pptx
@@ -38468,12 +38468,13 @@
               <a:t>Memory </a:t>
             </a:r>
             <a:br>
-              <a:rPr lang="en-US" dirty="0"/>
+              <a:rPr lang="en-US"/>
             </a:br>
             <a:r>
-              <a:rPr lang="en-US" dirty="0"/>
-              <a:t>Map</a:t>
-            </a:r>
+              <a:rPr lang="en-US"/>
+              <a:t>Map  </a:t>
+            </a:r>
+            <a:endParaRPr lang="en-US" dirty="0"/>
           </a:p>
         </p:txBody>
       </p:sp>

--- a/PPTs/Ch1_See_Program_Running.pptx
+++ b/PPTs/Ch1_See_Program_Running.pptx
@@ -581,7 +581,7 @@
             <a:fld id="{3AC3A17A-95E8-4381-B66B-5D6DE2B3048A}" type="datetimeFigureOut">
               <a:rPr lang="en-US" smtClean="0"/>
               <a:pPr/>
-              <a:t>8/30/2026</a:t>
+              <a:t>9/2/2026</a:t>
             </a:fld>
             <a:endParaRPr lang="en-US"/>
           </a:p>
@@ -2044,7 +2044,7 @@
                 <a:cs typeface="Arial" charset="0"/>
               </a:rPr>
               <a:pPr/>
-              <a:t>8/30/2026</a:t>
+              <a:t>9/2/2026</a:t>
             </a:fld>
             <a:endParaRPr lang="en-US">
               <a:latin typeface="Arial" charset="0"/>
@@ -2293,7 +2293,7 @@
             <a:pPr eaLnBrk="1" latinLnBrk="0" hangingPunct="1"/>
             <a:fld id="{3B6732A1-8A50-42D0-9FB5-A7CC4F887D83}" type="datetime1">
               <a:rPr lang="en-US" smtClean="0"/>
-              <a:t>8/30/2026</a:t>
+              <a:t>9/2/2026</a:t>
             </a:fld>
             <a:endParaRPr lang="en-US" sz="1600" dirty="0"/>
           </a:p>
@@ -2653,7 +2653,7 @@
             <a:pPr eaLnBrk="1" latinLnBrk="0" hangingPunct="1"/>
             <a:fld id="{932F6112-2530-4960-AA07-04E672D1E722}" type="datetime1">
               <a:rPr lang="en-US" smtClean="0"/>
-              <a:t>8/30/2026</a:t>
+              <a:t>9/2/2026</a:t>
             </a:fld>
             <a:endParaRPr lang="en-US"/>
           </a:p>
@@ -2829,7 +2829,7 @@
             <a:pPr eaLnBrk="1" latinLnBrk="0" hangingPunct="1"/>
             <a:fld id="{896A6EFF-8172-426D-9AC7-B0DD95EEE533}" type="datetime1">
               <a:rPr lang="en-US" smtClean="0"/>
-              <a:t>8/30/2026</a:t>
+              <a:t>9/2/2026</a:t>
             </a:fld>
             <a:endParaRPr lang="en-US"/>
           </a:p>
@@ -3065,7 +3065,7 @@
             <a:pPr eaLnBrk="1" latinLnBrk="0" hangingPunct="1"/>
             <a:fld id="{44B809B3-6A2C-46CF-98AB-C7B45372B065}" type="datetime1">
               <a:rPr lang="en-US" smtClean="0"/>
-              <a:t>8/30/2026</a:t>
+              <a:t>9/2/2026</a:t>
             </a:fld>
             <a:endParaRPr lang="en-US" dirty="0"/>
           </a:p>
@@ -3335,7 +3335,7 @@
             <a:pPr eaLnBrk="1" latinLnBrk="0" hangingPunct="1"/>
             <a:fld id="{C191117F-3CD7-4767-AEE5-49A060274EAA}" type="datetime1">
               <a:rPr lang="en-US" smtClean="0"/>
-              <a:t>8/30/2026</a:t>
+              <a:t>9/2/2026</a:t>
             </a:fld>
             <a:endParaRPr lang="en-US" dirty="0"/>
           </a:p>
@@ -3556,7 +3556,7 @@
             <a:pPr eaLnBrk="1" latinLnBrk="0" hangingPunct="1"/>
             <a:fld id="{47B8C5CE-9DF7-4BB4-863A-6E277DDC03D4}" type="datetime1">
               <a:rPr lang="en-US" smtClean="0"/>
-              <a:t>8/30/2026</a:t>
+              <a:t>9/2/2026</a:t>
             </a:fld>
             <a:endParaRPr lang="en-US"/>
           </a:p>
@@ -3909,7 +3909,7 @@
             <a:pPr eaLnBrk="1" latinLnBrk="0" hangingPunct="1"/>
             <a:fld id="{5EE11402-9D83-40E7-9253-0548CE63EB94}" type="datetime1">
               <a:rPr lang="en-US" smtClean="0"/>
-              <a:t>8/30/2026</a:t>
+              <a:t>9/2/2026</a:t>
             </a:fld>
             <a:endParaRPr lang="en-US"/>
           </a:p>
@@ -4142,7 +4142,7 @@
             <a:pPr eaLnBrk="1" latinLnBrk="0" hangingPunct="1"/>
             <a:fld id="{0C0C8811-C7DA-4658-BB60-F635F9220CDF}" type="datetime1">
               <a:rPr lang="en-US" smtClean="0"/>
-              <a:t>8/30/2026</a:t>
+              <a:t>9/2/2026</a:t>
             </a:fld>
             <a:endParaRPr lang="en-US"/>
           </a:p>
@@ -4284,7 +4284,7 @@
             <a:pPr eaLnBrk="1" latinLnBrk="0" hangingPunct="1"/>
             <a:fld id="{2EB38FCF-5E28-44CB-A212-D3E75CA77D8D}" type="datetime1">
               <a:rPr lang="en-US" smtClean="0"/>
-              <a:t>8/30/2026</a:t>
+              <a:t>9/2/2026</a:t>
             </a:fld>
             <a:endParaRPr lang="en-US"/>
           </a:p>
@@ -4562,7 +4562,7 @@
             <a:pPr eaLnBrk="1" latinLnBrk="0" hangingPunct="1"/>
             <a:fld id="{755FE7C6-0DE5-4400-A2DD-37AB2CB98797}" type="datetime1">
               <a:rPr lang="en-US" smtClean="0"/>
-              <a:t>8/30/2026</a:t>
+              <a:t>9/2/2026</a:t>
             </a:fld>
             <a:endParaRPr lang="en-US"/>
           </a:p>
@@ -4970,7 +4970,7 @@
             <a:pPr eaLnBrk="1" latinLnBrk="0" hangingPunct="1"/>
             <a:fld id="{7312819A-A7E0-496A-9C6B-0FBBF375D97B}" type="datetime1">
               <a:rPr lang="en-US" smtClean="0"/>
-              <a:t>8/30/2026</a:t>
+              <a:t>9/2/2026</a:t>
             </a:fld>
             <a:endParaRPr lang="en-US"/>
           </a:p>
@@ -5308,7 +5308,7 @@
             <a:pPr eaLnBrk="1" latinLnBrk="0" hangingPunct="1"/>
             <a:fld id="{0259BA2E-082A-4ACD-AA34-4B617DF5D259}" type="datetime1">
               <a:rPr lang="en-US" smtClean="0"/>
-              <a:t>8/30/2026</a:t>
+              <a:t>9/2/2026</a:t>
             </a:fld>
             <a:endParaRPr lang="en-US" sz="1400" dirty="0">
               <a:solidFill>
@@ -9422,7 +9422,7 @@
         <p:spPr>
           <a:xfrm>
             <a:off x="3038190" y="5861149"/>
-            <a:ext cx="5818581" cy="646331"/>
+            <a:ext cx="7022628" cy="646331"/>
           </a:xfrm>
           <a:prstGeom prst="rect">
             <a:avLst/>
@@ -9467,7 +9467,7 @@
                   <a:schemeClr val="accent1"/>
                 </a:solidFill>
               </a:rPr>
-              <a:t>brings in 32 bits, two 16-bit instructions)</a:t>
+              <a:t>brings in 32 bits, two 16-bit instructions in the same clock cycle)</a:t>
             </a:r>
           </a:p>
         </p:txBody>
@@ -38172,6 +38172,94 @@
           </a:extLst>
         </p:spPr>
       </p:pic>
+      <p:sp>
+        <p:nvSpPr>
+          <p:cNvPr id="3" name="TextBox 2">
+            <a:extLst>
+              <a:ext uri="{FF2B5EF4-FFF2-40B4-BE49-F238E27FC236}">
+                <a16:creationId xmlns:a16="http://schemas.microsoft.com/office/drawing/2014/main" id="{D26CA71B-4F36-4098-58C4-D2ABE2D718D6}"/>
+              </a:ext>
+            </a:extLst>
+          </p:cNvPr>
+          <p:cNvSpPr txBox="1"/>
+          <p:nvPr/>
+        </p:nvSpPr>
+        <p:spPr>
+          <a:xfrm>
+            <a:off x="6324600" y="5544882"/>
+            <a:ext cx="1412566" cy="400110"/>
+          </a:xfrm>
+          <a:prstGeom prst="rect">
+            <a:avLst/>
+          </a:prstGeom>
+          <a:noFill/>
+        </p:spPr>
+        <p:txBody>
+          <a:bodyPr wrap="none" rtlCol="0">
+            <a:spAutoFit/>
+          </a:bodyPr>
+          <a:lstStyle/>
+          <a:p>
+            <a:r>
+              <a:rPr lang="en-US" altLang="zh-CN" sz="2000" dirty="0">
+                <a:solidFill>
+                  <a:srgbClr val="FF0000"/>
+                </a:solidFill>
+              </a:rPr>
+              <a:t>Instructions</a:t>
+            </a:r>
+            <a:endParaRPr lang="zh-CN" altLang="en-US" sz="2000" dirty="0">
+              <a:solidFill>
+                <a:srgbClr val="FF0000"/>
+              </a:solidFill>
+            </a:endParaRPr>
+          </a:p>
+        </p:txBody>
+      </p:sp>
+      <p:sp>
+        <p:nvSpPr>
+          <p:cNvPr id="4" name="TextBox 3">
+            <a:extLst>
+              <a:ext uri="{FF2B5EF4-FFF2-40B4-BE49-F238E27FC236}">
+                <a16:creationId xmlns:a16="http://schemas.microsoft.com/office/drawing/2014/main" id="{01265C6A-47D5-FE4B-8D4F-B69531D63C54}"/>
+              </a:ext>
+            </a:extLst>
+          </p:cNvPr>
+          <p:cNvSpPr txBox="1"/>
+          <p:nvPr/>
+        </p:nvSpPr>
+        <p:spPr>
+          <a:xfrm>
+            <a:off x="6324600" y="4841365"/>
+            <a:ext cx="679994" cy="400110"/>
+          </a:xfrm>
+          <a:prstGeom prst="rect">
+            <a:avLst/>
+          </a:prstGeom>
+          <a:noFill/>
+        </p:spPr>
+        <p:txBody>
+          <a:bodyPr wrap="none" rtlCol="0">
+            <a:spAutoFit/>
+          </a:bodyPr>
+          <a:lstStyle/>
+          <a:p>
+            <a:r>
+              <a:rPr lang="en-US" altLang="zh-CN" sz="2000" dirty="0">
+                <a:solidFill>
+                  <a:schemeClr val="tx2"/>
+                </a:solidFill>
+              </a:rPr>
+              <a:t>Data</a:t>
+            </a:r>
+            <a:endParaRPr lang="zh-CN" altLang="en-US" sz="2000" dirty="0">
+              <a:solidFill>
+                <a:schemeClr val="tx2"/>
+              </a:solidFill>
+            </a:endParaRPr>
+          </a:p>
+        </p:txBody>
+      </p:sp>
     </p:spTree>
     <p:extLst>
       <p:ext uri="{BB962C8B-B14F-4D97-AF65-F5344CB8AC3E}">
